--- a/slides/indabax-reliable-ai-agents-fr.pptx
+++ b/slides/indabax-reliable-ai-agents-fr.pptx
@@ -851,7 +851,7 @@
           <a:lstStyle/>
           <a:p>
             <a:r>
-              <a:t>0:09–0:10. Annoncer les erreurs sans détailler leur implémentation. Chacune deviendra observable dans le notebook. De 10 à 14 minutes, ouvrir le notebook et lancer le setup. Former les binômes ; faire prédire le premier appel avant le checkpoint 1.</a:t>
+              <a:t>0:09–0:10. Le notebook commence par le contrat client et une interaction sans outils. Annoncer les erreurs sans détailler leur implémentation. Chacune deviendra observable dans le notebook. De 10 à 14 minutes, ouvrir le notebook et lancer le setup. Former les binômes ; faire prédire le premier appel avant le checkpoint 1.</a:t>
             </a:r>
           </a:p>
         </p:txBody>
@@ -1062,7 +1062,7 @@
           <a:lstStyle/>
           <a:p>
             <a:r>
-              <a:t>0:14–0:22. Setup terminé. Rôle Modèle : prédire l’outil et les arguments. Rôle Orchestrateur : expliquer pourquoi cette fonction peut répondre. La prévisualisation utilise le simulateur ; la mission complète utilisera Gemini si disponible. À 22 minutes, donner la solution du checkpoint si nécessaire.</a:t>
+              <a:t>0:14–0:22. Setup terminé. Rôle Modèle : prédire l’outil et les arguments. Rôle Orchestrateur : expliquer pourquoi cette fonction peut répondre. Lire le contrat client, observer le chatbot sans outils, puis utiliser le client choisi pour les appels. Le mode est affiché. À 22 minutes, donner la solution du checkpoint si nécessaire.</a:t>
             </a:r>
           </a:p>
         </p:txBody>
@@ -1273,7 +1273,7 @@
           <a:lstStyle/>
           <a:p>
             <a:r>
-              <a:t>0:22–0:31. TODO 3–4 : exécuter avec contrôle de provenance puis tracer. TODO 5–6 : conserver le message assistant et le résultat tool. Faire relire une entrée de trace. Demander ce qui manquerait au tour suivant sans cette observation.</a:t>
+              <a:t>0:22–0:31. L’exécution et la trace sont fournies : les lancer et lire le résultat. TODO 2 : conserver le message assistant et le résultat tool. Faire relire une entrée de trace. Demander ce qui manquerait au tour suivant sans cette observation.</a:t>
             </a:r>
           </a:p>
         </p:txBody>
@@ -1394,7 +1394,7 @@
           <a:lstStyle/>
           <a:p>
             <a:r>
-              <a:t>0:31–0:41. Échanger les rôles. Utiliser la slide 14 pendant le contre-exemple d’approbation absente, puis revenir à celle-ci. Compléter les TODO, exécuter la mission Gemini, puis relancer le contre-exemple. Choisir une autre panne : mesure altérée, approbation rejetée ou répétition. Un run corrigé doit être relancé avant les évaluations.</a:t>
+              <a:t>0:31–0:41. Échanger les rôles. Utiliser la slide 14 pendant le contre-exemple d’approbation absente, puis revenir à celle-ci. Observer la faute, compléter la condition du TODO 3, rejouer le même contre-exemple, puis lancer la mission. Choisir une autre panne : mesure altérée, approbation rejetée ou répétition. Un run corrigé doit être relancé avant les évaluations.</a:t>
             </a:r>
           </a:p>
         </p:txBody>
@@ -1604,7 +1604,7 @@
           <a:lstStyle/>
           <a:p>
             <a:r>
-              <a:t>0:42–0:46. Ce checkpoint partage les cinq minutes 41–46 avec les slides 15 et 17. TODO 10 doit exiger toutes les conditions avec all(row['checks'].values()). Faire lire une ligne PASS et justifier son résultat. Les dix scénarios sont sans API. Si le dossier est verrouillé après une correction, relancer mission_run puis les évaluations.</a:t>
+              <a:t>0:42–0:46. Ce checkpoint partage les cinq minutes 41–46 avec les slides 15 et 17. TODO 4 doit exiger toutes les conditions avec all(row['checks'].values()). Faire lire une ligne PASS et justifier son résultat. Les dix scénarios sont sans API. Si le dossier est verrouillé après une correction, relancer mission_run puis les évaluations.</a:t>
             </a:r>
           </a:p>
         </p:txBody>
@@ -8092,7 +8092,7 @@
                 </a:solidFill>
                 <a:latin typeface="Poppins"/>
               </a:rPr>
-              <a:t>Passer de l’alerte à la première mesure.</a:t>
+              <a:t>Passer du chatbot au premier appel d’outil.</a:t>
             </a:r>
           </a:p>
         </p:txBody>
@@ -8434,7 +8434,7 @@
                 </a:solidFill>
                 <a:latin typeface="Poppins"/>
               </a:rPr>
-              <a:t>Complétez TODO 1–2.</a:t>
+              <a:t>Complétez TODO 1.</a:t>
             </a:r>
           </a:p>
         </p:txBody>
@@ -8776,7 +8776,7 @@
                 </a:solidFill>
                 <a:latin typeface="Poppins"/>
               </a:rPr>
-              <a:t>Prévisualisation déterministe en mode mock. Le notebook explique le passage à Gemini.</a:t>
+              <a:t>Chatbot puis appel d’outil avec Gemini ou mock annoncé. Quatre décisions à compléter.</a:t>
             </a:r>
           </a:p>
         </p:txBody>
@@ -9271,7 +9271,7 @@
                 </a:solidFill>
                 <a:latin typeface="Poppins"/>
               </a:rPr>
-              <a:t>Exécutez et tracez l’appel : TODO 3–4.</a:t>
+              <a:t>Lancez l’exécution fournie.</a:t>
             </a:r>
           </a:p>
         </p:txBody>
@@ -9442,7 +9442,7 @@
                 </a:solidFill>
                 <a:latin typeface="Poppins"/>
               </a:rPr>
-              <a:t>Complétez l’historique : TODO 5–6.</a:t>
+              <a:t>Complétez l’historique : TODO 2.</a:t>
             </a:r>
           </a:p>
         </p:txBody>
@@ -9613,7 +9613,7 @@
                 </a:solidFill>
                 <a:latin typeface="Poppins"/>
               </a:rPr>
-              <a:t>Lisez la première entrée de trace.</a:t>
+              <a:t>Lancez le tour suivant.</a:t>
             </a:r>
           </a:p>
         </p:txBody>
@@ -9655,7 +9655,7 @@
                 </a:solidFill>
                 <a:latin typeface="Poppins"/>
               </a:rPr>
-              <a:t>Retrouvez la température obtenue et l’appel qui l’a produite.</a:t>
+              <a:t>Observez la recherche de procédure après la mesure.</a:t>
             </a:r>
           </a:p>
         </p:txBody>
@@ -10230,7 +10230,7 @@
                 </a:solidFill>
                 <a:latin typeface="Poppins"/>
               </a:rPr>
-              <a:t>Contrôlez les preuves : TODO 7–8.</a:t>
+              <a:t>Complétez la condition : TODO 3.</a:t>
             </a:r>
           </a:p>
         </p:txBody>
@@ -10401,7 +10401,7 @@
                 </a:solidFill>
                 <a:latin typeface="Poppins"/>
               </a:rPr>
-              <a:t>Bloquez les appels répétés : TODO 9.</a:t>
+              <a:t>Observez la protection fournie.</a:t>
             </a:r>
           </a:p>
         </p:txBody>
@@ -10572,7 +10572,7 @@
                 </a:solidFill>
                 <a:latin typeface="Poppins"/>
               </a:rPr>
-              <a:t>Lancez la mission, puis un contre-exemple.</a:t>
+              <a:t>Comparez avant et après correction.</a:t>
             </a:r>
           </a:p>
         </p:txBody>
@@ -13444,7 +13444,7 @@
                 </a:solidFill>
                 <a:latin typeface="Poppins"/>
               </a:rPr>
-              <a:t>Complétez TODO 10.</a:t>
+              <a:t>Complétez TODO 4.</a:t>
             </a:r>
           </a:p>
         </p:txBody>
